--- a/docs/คู่มือการใช้งาน-ระบบรายงานจัดซื้อ.pptx
+++ b/docs/คู่มือการใช้งาน-ระบบรายงานจัดซื้อ.pptx
@@ -119,7 +119,7 @@
   <p:extLst>
     <p:ext uri="{521415D9-36F7-43E2-AB2F-B90AF26B5E84}">
       <p14:sectionLst xmlns:p14="http://schemas.microsoft.com/office/powerpoint/2010/main">
-        <p14:section name="เริ่มต้น" id="{63641469-4ef1-ddbb-64aa-2ffd487afadf}">
+        <p14:section name="เริ่มต้น" id="{85c6a752-e643-1088-b930-d5b69c2e247b}">
           <p14:sldIdLst>
             <p14:sldId id="256"/>
             <p14:sldId id="257"/>
@@ -127,7 +127,7 @@
             <p14:sldId id="259"/>
           </p14:sldIdLst>
         </p14:section>
-        <p14:section name="ทีละหน้า" id="{5f74fed3-fb83-a766-e169-f8b9329469ec}">
+        <p14:section name="ทีละหน้า" id="{366c81b7-befd-4045-5e1e-38da09936b95}">
           <p14:sldIdLst>
             <p14:sldId id="260"/>
             <p14:sldId id="261"/>
@@ -136,7 +136,7 @@
             <p14:sldId id="264"/>
           </p14:sldIdLst>
         </p14:section>
-        <p14:section name="เข้าใจตัวเลข" id="{f65f9a99-5234-395d-042c-4cbf5307272a}">
+        <p14:section name="เข้าใจตัวเลข" id="{b11ca562-1f67-3993-6446-7027dff394f8}">
           <p14:sldIdLst>
             <p14:sldId id="265"/>
             <p14:sldId id="266"/>
@@ -4002,7 +4002,7 @@
                   <a:srgbClr val="7A4606"/>
                 </a:solidFill>
               </a:rPr>
-              <a:t>ตัวเลขไม่ได้สดตลอดเวลา</a:t>
+              <a:t>ตัวเลขช้าได้ถึง 30 นาที</a:t>
             </a:r>
             <a:endParaRPr lang="en-US" sz="1600" dirty="0"/>
           </a:p>
@@ -4041,7 +4041,7 @@
                   <a:srgbClr val="8A5008"/>
                 </a:solidFill>
               </a:rPr>
-              <a:t>ระบบคัดลอกข้อมูลจาก ERP มาเก็บไว้ ถ้าเพิ่งมีการบันทึกรับของเมื่อสักครู่ ต้องกดปุ่มอัปเดตก่อนจึงจะเห็น</a:t>
+              <a:t>ระบบคัดลอกข้อมูลจาก ERP มาเก็บไว้ แล้วดึงใหม่ให้เองทุก 30 นาที ถ้าสต็อกเพิ่งบันทึกรับของเมื่อสักครู่อาจยังไม่เห็น กดปุ่มอัปเดตเองได้</a:t>
             </a:r>
             <a:endParaRPr lang="en-US" sz="1250" dirty="0"/>
           </a:p>
@@ -6719,11 +6719,11 @@
             </a:avLst>
           </a:prstGeom>
           <a:solidFill>
-            <a:srgbClr val="FDF3E2"/>
+            <a:srgbClr val="E7F4EC"/>
           </a:solidFill>
           <a:ln w="12700">
             <a:solidFill>
-              <a:srgbClr val="F0DCB8"/>
+              <a:srgbClr val="BEE0CC"/>
             </a:solidFill>
             <a:prstDash val="solid"/>
           </a:ln>
@@ -6756,10 +6756,10 @@
             <a:r>
               <a:rPr lang="en-US" sz="1400" b="1" dirty="0">
                 <a:solidFill>
-                  <a:srgbClr val="8A5008"/>
-                </a:solidFill>
-              </a:rPr>
-              <a:t>ข้อมูลไม่ได้อัปเดตเอง</a:t>
+                  <a:srgbClr val="14603A"/>
+                </a:solidFill>
+              </a:rPr>
+              <a:t>ข้อมูลอัปเดตให้เองทุก 30 นาที</a:t>
             </a:r>
             <a:endParaRPr lang="en-US" sz="1400" dirty="0"/>
           </a:p>
@@ -6795,10 +6795,10 @@
             <a:r>
               <a:rPr lang="en-US" sz="1200" dirty="0">
                 <a:solidFill>
-                  <a:srgbClr val="8A5008"/>
-                </a:solidFill>
-              </a:rPr>
-              <a:t>กดปุ่ม "อัปเดตข้อมูลจาก ERP" มุมขวาบน ใช้เวลาประมาณ 20 วินาที  ถ้าไม่กด ตัวเลขจะเป็นของรอบที่อัปเดตล่าสุด</a:t>
+                  <a:srgbClr val="14603A"/>
+                </a:solidFill>
+              </a:rPr>
+              <a:t>ไม่ต้องกดอะไร  มุมขวาบนบอกว่าอัปเดตล่าสุดเมื่อไหร่  ถ้าอยากได้ข้อมูลเดี๋ยวนั้น กดปุ่มอัปเดตมุมขวาบนได้ ใช้เวลาราว 20 วินาที</a:t>
             </a:r>
             <a:endParaRPr lang="en-US" sz="1200" dirty="0"/>
           </a:p>
@@ -8107,7 +8107,7 @@
         </p:nvSpPr>
         <p:spPr>
           <a:xfrm>
-            <a:off x="7955280" y="1600200"/>
+            <a:off x="7955280" y="1554480"/>
             <a:ext cx="237744" cy="237744"/>
           </a:xfrm>
           <a:prstGeom prst="ellipse">
@@ -8132,7 +8132,7 @@
         </p:nvSpPr>
         <p:spPr>
           <a:xfrm>
-            <a:off x="7955280" y="1600200"/>
+            <a:off x="7955280" y="1554480"/>
             <a:ext cx="237744" cy="237744"/>
           </a:xfrm>
           <a:prstGeom prst="rect">
@@ -8168,7 +8168,7 @@
         </p:nvSpPr>
         <p:spPr>
           <a:xfrm>
-            <a:off x="8302752" y="1554480"/>
+            <a:off x="8302752" y="1508760"/>
             <a:ext cx="3383280" cy="914400"/>
           </a:xfrm>
           <a:prstGeom prst="rect">
@@ -8193,7 +8193,7 @@
                   <a:schemeClr val="tx1"/>
                 </a:solidFill>
               </a:rPr>
-              <a:t>การ์ดตัวเลข 6 ใบ
+              <a:t>มุมขวาบน
 </a:t>
             </a:r>
             <a:pPr indent="0" marL="0">
@@ -8208,7 +8208,7 @@
                   <a:schemeClr val="accent6"/>
                 </a:solidFill>
               </a:rPr>
-              <a:t>สรุปยอดของช่วงที่เลือก กดเข้าไปดูตารางได้</a:t>
+              <a:t>บอกว่าอัปเดตล่าสุดเมื่อไหร่ และดึงใหม่ให้ทุก 30 นาที</a:t>
             </a:r>
             <a:endParaRPr lang="en-US" sz="1300" dirty="0"/>
           </a:p>
@@ -8222,7 +8222,7 @@
         </p:nvSpPr>
         <p:spPr>
           <a:xfrm>
-            <a:off x="7955280" y="2514600"/>
+            <a:off x="7955280" y="2468880"/>
             <a:ext cx="237744" cy="237744"/>
           </a:xfrm>
           <a:prstGeom prst="ellipse">
@@ -8247,7 +8247,7 @@
         </p:nvSpPr>
         <p:spPr>
           <a:xfrm>
-            <a:off x="7955280" y="2514600"/>
+            <a:off x="7955280" y="2468880"/>
             <a:ext cx="237744" cy="237744"/>
           </a:xfrm>
           <a:prstGeom prst="rect">
@@ -8283,8 +8283,8 @@
         </p:nvSpPr>
         <p:spPr>
           <a:xfrm>
-            <a:off x="8302752" y="2468880"/>
-            <a:ext cx="3383280" cy="1234440"/>
+            <a:off x="8302752" y="2423160"/>
+            <a:ext cx="3383280" cy="868680"/>
           </a:xfrm>
           <a:prstGeom prst="rect">
             <a:avLst/>
@@ -8308,7 +8308,7 @@
                   <a:schemeClr val="tx1"/>
                 </a:solidFill>
               </a:rPr>
-              <a:t>กราฟ 12 เดือน
+              <a:t>การ์ดตัวเลข 6 ใบ
 </a:t>
             </a:r>
             <a:pPr indent="0" marL="0">
@@ -8323,24 +8323,7 @@
                   <a:schemeClr val="accent6"/>
                 </a:solidFill>
               </a:rPr>
-              <a:t>แท่งเข้ม = ยอดสั่งซื้อ  แท่งอ่อน = ยอดรับเข้า</a:t>
-            </a:r>
-            <a:endParaRPr lang="en-US" sz="1300" dirty="0"/>
-          </a:p>
-          <a:p>
-            <a:pPr indent="0" marL="0">
-              <a:lnSpc>
-                <a:spcPct val="120000"/>
-              </a:lnSpc>
-              <a:buNone/>
-            </a:pPr>
-            <a:r>
-              <a:rPr lang="en-US" sz="1200" dirty="0">
-                <a:solidFill>
-                  <a:schemeClr val="accent6"/>
-                </a:solidFill>
-              </a:rPr>
-              <a:t>เดือนล่าสุดอยู่ซ้ายสุด</a:t>
+              <a:t>สรุปยอดของช่วงที่เลือก กดเข้าไปดูตารางได้</a:t>
             </a:r>
             <a:endParaRPr lang="en-US" sz="1300" dirty="0"/>
           </a:p>
@@ -8354,7 +8337,7 @@
         </p:nvSpPr>
         <p:spPr>
           <a:xfrm>
-            <a:off x="7955280" y="3749040"/>
+            <a:off x="7955280" y="3337560"/>
             <a:ext cx="237744" cy="237744"/>
           </a:xfrm>
           <a:prstGeom prst="ellipse">
@@ -8379,7 +8362,7 @@
         </p:nvSpPr>
         <p:spPr>
           <a:xfrm>
-            <a:off x="7955280" y="3749040"/>
+            <a:off x="7955280" y="3337560"/>
             <a:ext cx="237744" cy="237744"/>
           </a:xfrm>
           <a:prstGeom prst="rect">
@@ -8415,8 +8398,8 @@
         </p:nvSpPr>
         <p:spPr>
           <a:xfrm>
-            <a:off x="8302752" y="3703320"/>
-            <a:ext cx="3383280" cy="914400"/>
+            <a:off x="8302752" y="3291840"/>
+            <a:ext cx="3383280" cy="1188720"/>
           </a:xfrm>
           <a:prstGeom prst="rect">
             <a:avLst/>
@@ -8440,7 +8423,7 @@
                   <a:schemeClr val="tx1"/>
                 </a:solidFill>
               </a:rPr>
-              <a:t>คลิกแท่งกราฟได้
+              <a:t>กราฟ 12 เดือน
 </a:t>
             </a:r>
             <a:pPr indent="0" marL="0">
@@ -8455,7 +8438,7 @@
                   <a:schemeClr val="accent6"/>
                 </a:solidFill>
               </a:rPr>
-              <a:t>คลิกแล้วเด้งไปดูรายการของเดือนนั้นทันที</a:t>
+              <a:t>แท่งเข้ม = ยอดสั่งซื้อ · แท่งอ่อน = ยอดรับเข้า · เดือนล่าสุดอยู่ซ้ายสุด</a:t>
             </a:r>
             <a:endParaRPr lang="en-US" sz="1300" dirty="0"/>
           </a:p>
@@ -8469,7 +8452,7 @@
         </p:nvSpPr>
         <p:spPr>
           <a:xfrm>
-            <a:off x="7955280" y="4663440"/>
+            <a:off x="7955280" y="4526280"/>
             <a:ext cx="237744" cy="237744"/>
           </a:xfrm>
           <a:prstGeom prst="ellipse">
@@ -8494,7 +8477,7 @@
         </p:nvSpPr>
         <p:spPr>
           <a:xfrm>
-            <a:off x="7955280" y="4663440"/>
+            <a:off x="7955280" y="4526280"/>
             <a:ext cx="237744" cy="237744"/>
           </a:xfrm>
           <a:prstGeom prst="rect">
@@ -8530,8 +8513,123 @@
         </p:nvSpPr>
         <p:spPr>
           <a:xfrm>
-            <a:off x="8302752" y="4617720"/>
-            <a:ext cx="3383280" cy="914400"/>
+            <a:off x="8302752" y="4480560"/>
+            <a:ext cx="3383280" cy="868680"/>
+          </a:xfrm>
+          <a:prstGeom prst="rect">
+            <a:avLst/>
+          </a:prstGeom>
+          <a:noFill/>
+          <a:ln/>
+        </p:spPr>
+        <p:txBody>
+          <a:bodyPr wrap="square" lIns="0" tIns="0" rIns="0" bIns="0" rtlCol="0" anchor="t"/>
+          <a:lstStyle/>
+          <a:p>
+            <a:pPr indent="0" marL="0">
+              <a:lnSpc>
+                <a:spcPct val="120000"/>
+              </a:lnSpc>
+              <a:buNone/>
+            </a:pPr>
+            <a:r>
+              <a:rPr lang="en-US" sz="1300" b="1" dirty="0">
+                <a:solidFill>
+                  <a:schemeClr val="tx1"/>
+                </a:solidFill>
+              </a:rPr>
+              <a:t>คลิกแท่งกราฟได้
+</a:t>
+            </a:r>
+            <a:pPr indent="0" marL="0">
+              <a:lnSpc>
+                <a:spcPct val="120000"/>
+              </a:lnSpc>
+              <a:buNone/>
+            </a:pPr>
+            <a:r>
+              <a:rPr lang="en-US" sz="1200" dirty="0">
+                <a:solidFill>
+                  <a:schemeClr val="accent6"/>
+                </a:solidFill>
+              </a:rPr>
+              <a:t>คลิกแล้วเด้งไปดูรายการของเดือนนั้นทันที</a:t>
+            </a:r>
+            <a:endParaRPr lang="en-US" sz="1300" dirty="0"/>
+          </a:p>
+        </p:txBody>
+      </p:sp>
+      <p:sp>
+        <p:nvSpPr>
+          <p:cNvPr id="17" name="Shape 14"/>
+          <p:cNvSpPr/>
+          <p:nvPr/>
+        </p:nvSpPr>
+        <p:spPr>
+          <a:xfrm>
+            <a:off x="7955280" y="5394960"/>
+            <a:ext cx="237744" cy="237744"/>
+          </a:xfrm>
+          <a:prstGeom prst="ellipse">
+            <a:avLst/>
+          </a:prstGeom>
+          <a:solidFill>
+            <a:schemeClr val="accent1"/>
+          </a:solidFill>
+          <a:ln w="12700">
+            <a:solidFill>
+              <a:schemeClr val="accent1"/>
+            </a:solidFill>
+            <a:prstDash val="solid"/>
+          </a:ln>
+        </p:spPr>
+      </p:sp>
+      <p:sp>
+        <p:nvSpPr>
+          <p:cNvPr id="18" name="Text 15"/>
+          <p:cNvSpPr txBox="1"/>
+          <p:nvPr/>
+        </p:nvSpPr>
+        <p:spPr>
+          <a:xfrm>
+            <a:off x="7955280" y="5394960"/>
+            <a:ext cx="237744" cy="237744"/>
+          </a:xfrm>
+          <a:prstGeom prst="rect">
+            <a:avLst/>
+          </a:prstGeom>
+          <a:noFill/>
+          <a:ln/>
+        </p:spPr>
+        <p:txBody>
+          <a:bodyPr wrap="square" lIns="0" tIns="0" rIns="0" bIns="0" rtlCol="0" anchor="ctr"/>
+          <a:lstStyle/>
+          <a:p>
+            <a:pPr algn="ctr" indent="0" marL="0">
+              <a:buNone/>
+            </a:pPr>
+            <a:r>
+              <a:rPr lang="en-US" sz="1100" b="1" dirty="0">
+                <a:solidFill>
+                  <a:schemeClr val="bg1"/>
+                </a:solidFill>
+              </a:rPr>
+              <a:t>5</a:t>
+            </a:r>
+            <a:endParaRPr lang="en-US" sz="1100" dirty="0"/>
+          </a:p>
+        </p:txBody>
+      </p:sp>
+      <p:sp>
+        <p:nvSpPr>
+          <p:cNvPr id="19" name="Text 16"/>
+          <p:cNvSpPr txBox="1"/>
+          <p:nvPr/>
+        </p:nvSpPr>
+        <p:spPr>
+          <a:xfrm>
+            <a:off x="8302752" y="5349240"/>
+            <a:ext cx="3383280" cy="868680"/>
           </a:xfrm>
           <a:prstGeom prst="rect">
             <a:avLst/>
